--- a/output/archive/Tarnovell_Group/Commercial/Cross_Sell/2026/One_Tarnovell_Services_Cross_Sell_2026-06.pptx
+++ b/output/archive/Tarnovell_Group/Commercial/Cross_Sell/2026/One_Tarnovell_Services_Cross_Sell_2026-06.pptx
@@ -5088,7 +5088,7 @@
               <a:rPr sz="1500">
                 <a:latin typeface="Arial"/>
               </a:rPr>
-              <a:t>Target validation: is the target expressed in the right tissue, cell type and patients?</a:t>
+              <a:t>Target validation support: expression evidence in the right tissue, cell type and patients to guide functional testing</a:t>
             </a:r>
           </a:p>
           <a:p>
@@ -5106,7 +5106,7 @@
               <a:rPr sz="1500">
                 <a:latin typeface="Arial"/>
               </a:rPr>
-              <a:t>Biomarkers and stratification: which patients respond, and how to track it</a:t>
+              <a:t>Biomarker candidates: response signatures and monitoring markers for validation</a:t>
             </a:r>
           </a:p>
           <a:p>
